--- a/docs/presentation/Tiger-CS-Application-Architecture.pptx
+++ b/docs/presentation/Tiger-CS-Application-Architecture.pptx
@@ -10516,7 +10516,7 @@
                 <a:ea typeface="Calibri" pitchFamily="34" charset="-122"/>
                 <a:cs typeface="Calibri" pitchFamily="34" charset="-120"/>
               </a:rPr>
-              <a:t>Reverse Proxy / Load Balancer</a:t>
+              <a:t>Web Server / Secure Gateway (IIS or Nginx)</a:t>
             </a:r>
             <a:endParaRPr lang="en-US" sz="1020" dirty="0"/>
           </a:p>
@@ -11071,7 +11071,7 @@
                 <a:ea typeface="Calibri" pitchFamily="34" charset="-122"/>
                 <a:cs typeface="Calibri" pitchFamily="34" charset="-120"/>
               </a:rPr>
-              <a:t>Reverse Proxy / Load Balancer</a:t>
+              <a:t>Web Server / Secure Gateway (IIS or Nginx)</a:t>
             </a:r>
             <a:endParaRPr lang="en-US" sz="1020" dirty="0"/>
           </a:p>
@@ -11626,7 +11626,7 @@
                 <a:ea typeface="Calibri" pitchFamily="34" charset="-122"/>
                 <a:cs typeface="Calibri" pitchFamily="34" charset="-120"/>
               </a:rPr>
-              <a:t>Reverse Proxy / Load Balancer</a:t>
+              <a:t>Web Server / Secure Gateway (IIS or Nginx)</a:t>
             </a:r>
             <a:endParaRPr lang="en-US" sz="1020" dirty="0"/>
           </a:p>

--- a/docs/presentation/Tiger-CS-Application-Architecture.pptx
+++ b/docs/presentation/Tiger-CS-Application-Architecture.pptx
@@ -12621,12 +12621,12 @@
         </p:nvSpPr>
         <p:spPr>
           <a:xfrm>
-            <a:off x="457200" y="3063240"/>
-            <a:ext cx="11277295" cy="777240"/>
+            <a:off x="457200" y="2971800"/>
+            <a:ext cx="11277295" cy="1234440"/>
           </a:xfrm>
           <a:prstGeom prst="roundRect">
             <a:avLst>
-              <a:gd name="adj" fmla="val 9412"/>
+              <a:gd name="adj" fmla="val 5926"/>
             </a:avLst>
           </a:prstGeom>
           <a:solidFill>
@@ -12655,8 +12655,8 @@
         </p:nvSpPr>
         <p:spPr>
           <a:xfrm>
-            <a:off x="777240" y="3063240"/>
-            <a:ext cx="10637215" cy="777240"/>
+            <a:off x="777240" y="3108960"/>
+            <a:ext cx="10637215" cy="320040"/>
           </a:xfrm>
           <a:prstGeom prst="rect">
             <a:avLst/>
@@ -12668,7 +12668,7 @@
           <a:bodyPr wrap="square" lIns="0" tIns="0" rIns="0" bIns="0" rtlCol="0" anchor="ctr"/>
           <a:lstStyle/>
           <a:p>
-            <a:pPr algn="l" indent="0" marL="0">
+            <a:pPr indent="0" marL="0">
               <a:buNone/>
             </a:pPr>
             <a:r>
@@ -12676,17 +12676,42 @@
                 <a:solidFill>
                   <a:srgbClr val="1C2B4A"/>
                 </a:solidFill>
-                <a:latin typeface="Calibri" pitchFamily="34" charset="0"/>
-                <a:ea typeface="Calibri" pitchFamily="34" charset="-122"/>
-                <a:cs typeface="Calibri" pitchFamily="34" charset="-120"/>
-              </a:rPr>
-              <a:t>Delivery model:  </a:t>
-            </a:r>
-            <a:pPr algn="l" indent="0" marL="0">
-              <a:buNone/>
-            </a:pPr>
-            <a:r>
-              <a:rPr lang="en-US" sz="1600" dirty="0">
+                <a:latin typeface="Cambria" pitchFamily="34" charset="0"/>
+                <a:ea typeface="Cambria" pitchFamily="34" charset="-122"/>
+                <a:cs typeface="Cambria" pitchFamily="34" charset="-120"/>
+              </a:rPr>
+              <a:t>Three-Week Internal Pilot</a:t>
+            </a:r>
+            <a:endParaRPr lang="en-US" sz="1600" dirty="0"/>
+          </a:p>
+        </p:txBody>
+      </p:sp>
+      <p:sp>
+        <p:nvSpPr>
+          <p:cNvPr id="15" name="Text 13"/>
+          <p:cNvSpPr/>
+          <p:nvPr/>
+        </p:nvSpPr>
+        <p:spPr>
+          <a:xfrm>
+            <a:off x="777240" y="3456432"/>
+            <a:ext cx="10637215" cy="685800"/>
+          </a:xfrm>
+          <a:prstGeom prst="rect">
+            <a:avLst/>
+          </a:prstGeom>
+          <a:noFill/>
+          <a:ln/>
+        </p:spPr>
+        <p:txBody>
+          <a:bodyPr wrap="square" lIns="0" tIns="0" rIns="0" bIns="0" rtlCol="0" anchor="t"/>
+          <a:lstStyle/>
+          <a:p>
+            <a:pPr indent="0" marL="0">
+              <a:buNone/>
+            </a:pPr>
+            <a:r>
+              <a:rPr lang="en-US" sz="1300" dirty="0">
                 <a:solidFill>
                   <a:srgbClr val="3A3F44"/>
                 </a:solidFill>
@@ -12694,26 +12719,26 @@
                 <a:ea typeface="Calibri" pitchFamily="34" charset="-122"/>
                 <a:cs typeface="Calibri" pitchFamily="34" charset="-120"/>
               </a:rPr>
-              <a:t>Four-week, one-developer, AI-assisted pilot</a:t>
-            </a:r>
-            <a:endParaRPr lang="en-US" sz="1600" dirty="0"/>
-          </a:p>
-        </p:txBody>
-      </p:sp>
-      <p:sp>
-        <p:nvSpPr>
-          <p:cNvPr id="15" name="Shape 13"/>
-          <p:cNvSpPr/>
-          <p:nvPr/>
-        </p:nvSpPr>
-        <p:spPr>
-          <a:xfrm>
-            <a:off x="457200" y="4160520"/>
-            <a:ext cx="5455768" cy="1737360"/>
+              <a:t>A functional version will be delivered for internal testing within three weeks, developed by one developer with AI-assisted development. Following successful testing and management approval, a separate production-readiness phase will prepare the system for official go-live.</a:t>
+            </a:r>
+            <a:endParaRPr lang="en-US" sz="1300" dirty="0"/>
+          </a:p>
+        </p:txBody>
+      </p:sp>
+      <p:sp>
+        <p:nvSpPr>
+          <p:cNvPr id="16" name="Shape 14"/>
+          <p:cNvSpPr/>
+          <p:nvPr/>
+        </p:nvSpPr>
+        <p:spPr>
+          <a:xfrm>
+            <a:off x="457200" y="4434840"/>
+            <a:ext cx="5455768" cy="1600200"/>
           </a:xfrm>
           <a:prstGeom prst="roundRect">
             <a:avLst>
-              <a:gd name="adj" fmla="val 4211"/>
+              <a:gd name="adj" fmla="val 4571"/>
             </a:avLst>
           </a:prstGeom>
           <a:solidFill>
@@ -12736,13 +12761,13 @@
       </p:sp>
       <p:sp>
         <p:nvSpPr>
-          <p:cNvPr id="16" name="Shape 14"/>
-          <p:cNvSpPr/>
-          <p:nvPr/>
-        </p:nvSpPr>
-        <p:spPr>
-          <a:xfrm>
-            <a:off x="731520" y="4434840"/>
+          <p:cNvPr id="17" name="Shape 15"/>
+          <p:cNvSpPr/>
+          <p:nvPr/>
+        </p:nvSpPr>
+        <p:spPr>
+          <a:xfrm>
+            <a:off x="731520" y="4690872"/>
             <a:ext cx="502920" cy="502920"/>
           </a:xfrm>
           <a:prstGeom prst="ellipse">
@@ -12756,13 +12781,13 @@
       </p:sp>
       <p:sp>
         <p:nvSpPr>
-          <p:cNvPr id="17" name="Text 15"/>
-          <p:cNvSpPr/>
-          <p:nvPr/>
-        </p:nvSpPr>
-        <p:spPr>
-          <a:xfrm>
-            <a:off x="731520" y="4434840"/>
+          <p:cNvPr id="18" name="Text 16"/>
+          <p:cNvSpPr/>
+          <p:nvPr/>
+        </p:nvSpPr>
+        <p:spPr>
+          <a:xfrm>
+            <a:off x="731520" y="4690872"/>
             <a:ext cx="502920" cy="502920"/>
           </a:xfrm>
           <a:prstGeom prst="rect">
@@ -12795,13 +12820,13 @@
       </p:sp>
       <p:sp>
         <p:nvSpPr>
-          <p:cNvPr id="18" name="Text 16"/>
-          <p:cNvSpPr/>
-          <p:nvPr/>
-        </p:nvSpPr>
-        <p:spPr>
-          <a:xfrm>
-            <a:off x="1417320" y="4370832"/>
+          <p:cNvPr id="19" name="Text 17"/>
+          <p:cNvSpPr/>
+          <p:nvPr/>
+        </p:nvSpPr>
+        <p:spPr>
+          <a:xfrm>
+            <a:off x="1417320" y="4626864"/>
             <a:ext cx="3809848" cy="365760"/>
           </a:xfrm>
           <a:prstGeom prst="rect">
@@ -12834,14 +12859,14 @@
       </p:sp>
       <p:sp>
         <p:nvSpPr>
-          <p:cNvPr id="19" name="Text 17"/>
-          <p:cNvSpPr/>
-          <p:nvPr/>
-        </p:nvSpPr>
-        <p:spPr>
-          <a:xfrm>
-            <a:off x="1417320" y="4754880"/>
-            <a:ext cx="3718408" cy="1005840"/>
+          <p:cNvPr id="20" name="Text 18"/>
+          <p:cNvSpPr/>
+          <p:nvPr/>
+        </p:nvSpPr>
+        <p:spPr>
+          <a:xfrm>
+            <a:off x="1417320" y="5010912"/>
+            <a:ext cx="3718408" cy="914400"/>
           </a:xfrm>
           <a:prstGeom prst="rect">
             <a:avLst/>
@@ -12873,18 +12898,18 @@
       </p:sp>
       <p:sp>
         <p:nvSpPr>
-          <p:cNvPr id="20" name="Shape 18"/>
-          <p:cNvSpPr/>
-          <p:nvPr/>
-        </p:nvSpPr>
-        <p:spPr>
-          <a:xfrm>
-            <a:off x="6278728" y="4160520"/>
-            <a:ext cx="5455768" cy="1737360"/>
+          <p:cNvPr id="21" name="Shape 19"/>
+          <p:cNvSpPr/>
+          <p:nvPr/>
+        </p:nvSpPr>
+        <p:spPr>
+          <a:xfrm>
+            <a:off x="6278728" y="4434840"/>
+            <a:ext cx="5455768" cy="1600200"/>
           </a:xfrm>
           <a:prstGeom prst="roundRect">
             <a:avLst>
-              <a:gd name="adj" fmla="val 4211"/>
+              <a:gd name="adj" fmla="val 4571"/>
             </a:avLst>
           </a:prstGeom>
           <a:solidFill>
@@ -12907,13 +12932,13 @@
       </p:sp>
       <p:sp>
         <p:nvSpPr>
-          <p:cNvPr id="21" name="Shape 19"/>
-          <p:cNvSpPr/>
-          <p:nvPr/>
-        </p:nvSpPr>
-        <p:spPr>
-          <a:xfrm>
-            <a:off x="6553048" y="4434840"/>
+          <p:cNvPr id="22" name="Shape 20"/>
+          <p:cNvSpPr/>
+          <p:nvPr/>
+        </p:nvSpPr>
+        <p:spPr>
+          <a:xfrm>
+            <a:off x="6553048" y="4690872"/>
             <a:ext cx="502920" cy="502920"/>
           </a:xfrm>
           <a:prstGeom prst="ellipse">
@@ -12927,13 +12952,13 @@
       </p:sp>
       <p:sp>
         <p:nvSpPr>
-          <p:cNvPr id="22" name="Text 20"/>
-          <p:cNvSpPr/>
-          <p:nvPr/>
-        </p:nvSpPr>
-        <p:spPr>
-          <a:xfrm>
-            <a:off x="6553048" y="4434840"/>
+          <p:cNvPr id="23" name="Text 21"/>
+          <p:cNvSpPr/>
+          <p:nvPr/>
+        </p:nvSpPr>
+        <p:spPr>
+          <a:xfrm>
+            <a:off x="6553048" y="4690872"/>
             <a:ext cx="502920" cy="502920"/>
           </a:xfrm>
           <a:prstGeom prst="rect">
@@ -12966,13 +12991,13 @@
       </p:sp>
       <p:sp>
         <p:nvSpPr>
-          <p:cNvPr id="23" name="Text 21"/>
-          <p:cNvSpPr/>
-          <p:nvPr/>
-        </p:nvSpPr>
-        <p:spPr>
-          <a:xfrm>
-            <a:off x="7238848" y="4370832"/>
+          <p:cNvPr id="24" name="Text 22"/>
+          <p:cNvSpPr/>
+          <p:nvPr/>
+        </p:nvSpPr>
+        <p:spPr>
+          <a:xfrm>
+            <a:off x="7238848" y="4626864"/>
             <a:ext cx="3809848" cy="365760"/>
           </a:xfrm>
           <a:prstGeom prst="rect">
@@ -13005,14 +13030,14 @@
       </p:sp>
       <p:sp>
         <p:nvSpPr>
-          <p:cNvPr id="24" name="Text 22"/>
-          <p:cNvSpPr/>
-          <p:nvPr/>
-        </p:nvSpPr>
-        <p:spPr>
-          <a:xfrm>
-            <a:off x="7238848" y="4754880"/>
-            <a:ext cx="3718408" cy="1005840"/>
+          <p:cNvPr id="25" name="Text 23"/>
+          <p:cNvSpPr/>
+          <p:nvPr/>
+        </p:nvSpPr>
+        <p:spPr>
+          <a:xfrm>
+            <a:off x="7238848" y="5010912"/>
+            <a:ext cx="3718408" cy="914400"/>
           </a:xfrm>
           <a:prstGeom prst="rect">
             <a:avLst/>
@@ -13044,7 +13069,7 @@
       </p:sp>
       <p:sp>
         <p:nvSpPr>
-          <p:cNvPr id="25" name="Text 23"/>
+          <p:cNvPr id="26" name="Text 24"/>
           <p:cNvSpPr/>
           <p:nvPr/>
         </p:nvSpPr>
@@ -13083,7 +13108,7 @@
       </p:sp>
       <p:sp>
         <p:nvSpPr>
-          <p:cNvPr id="26" name="Text 24"/>
+          <p:cNvPr id="27" name="Text 25"/>
           <p:cNvSpPr/>
           <p:nvPr/>
         </p:nvSpPr>
